--- a/老虎機專案簡報.pptx
+++ b/老虎機專案簡報.pptx
@@ -1201,19 +1201,17 @@
           <a:bodyPr wrap="square" rtlCol="0" anchor="ctr"/>
           <a:lstStyle/>
           <a:p>
-            <a:pPr marL="0" indent="0" algn="ctr">
-              <a:buNone/>
-            </a:pPr>
-            <a:r>
-              <a:rPr lang="en-US" sz="4400" dirty="0">
-                <a:solidFill>
-                  <a:srgbClr val="E8ECF3"/>
-                </a:solidFill>
-                <a:latin typeface="Calibri" pitchFamily="34" charset="0"/>
-                <a:ea typeface="Calibri" pitchFamily="34" charset="-122"/>
-                <a:cs typeface="Calibri" pitchFamily="34" charset="-120"/>
-              </a:rPr>
-              <a:t>🃏</a:t>
+            <a:pPr algn="ctr"/>
+            <a:r>
+              <a:rPr lang="en-US" altLang="zh-TW" sz="4400" b="1" dirty="0">
+                <a:solidFill>
+                  <a:srgbClr val="FFC107"/>
+                </a:solidFill>
+                <a:latin typeface="Cambria" pitchFamily="34" charset="0"/>
+                <a:ea typeface="Cambria" pitchFamily="34" charset="-122"/>
+                <a:cs typeface="Cambria" pitchFamily="34" charset="-120"/>
+              </a:rPr>
+              <a:t>⭐</a:t>
             </a:r>
             <a:endParaRPr lang="en-US" sz="4400" dirty="0"/>
           </a:p>
@@ -3526,7 +3524,7 @@
                 </a:solidFill>
                 <a:latin typeface="Calibri"/>
               </a:rPr>
-              <a:t>win，再更新成含最終</a:t>
+              <a:t>win，再更新成最終</a:t>
             </a:r>
             <a:r>
               <a:rPr lang="zh-TW" altLang="en-US" sz="1400" dirty="0">
@@ -4949,7 +4947,7 @@
         </p:nvSpPr>
         <p:spPr>
           <a:xfrm>
-            <a:off x="685800" y="2148840"/>
+            <a:off x="670560" y="2148840"/>
             <a:ext cx="5212080" cy="3429000"/>
           </a:xfrm>
           <a:prstGeom prst="roundRect">
@@ -5302,7 +5300,7 @@
         </p:nvSpPr>
         <p:spPr>
           <a:xfrm>
-            <a:off x="6309360" y="2148840"/>
+            <a:off x="6309362" y="2148840"/>
             <a:ext cx="5212080" cy="3429000"/>
           </a:xfrm>
           <a:prstGeom prst="roundRect">

--- a/老虎機專案簡報.pptx
+++ b/老虎機專案簡報.pptx
@@ -5,16 +5,17 @@
     <p:sldMasterId id="2147483648" r:id="rId1"/>
   </p:sldMasterIdLst>
   <p:notesMasterIdLst>
-    <p:notesMasterId r:id="rId9"/>
+    <p:notesMasterId r:id="rId10"/>
   </p:notesMasterIdLst>
   <p:sldIdLst>
     <p:sldId id="256" r:id="rId2"/>
     <p:sldId id="257" r:id="rId3"/>
-    <p:sldId id="258" r:id="rId4"/>
-    <p:sldId id="264" r:id="rId5"/>
-    <p:sldId id="259" r:id="rId6"/>
-    <p:sldId id="265" r:id="rId7"/>
-    <p:sldId id="263" r:id="rId8"/>
+    <p:sldId id="266" r:id="rId4"/>
+    <p:sldId id="258" r:id="rId5"/>
+    <p:sldId id="264" r:id="rId6"/>
+    <p:sldId id="259" r:id="rId7"/>
+    <p:sldId id="265" r:id="rId8"/>
+    <p:sldId id="263" r:id="rId9"/>
   </p:sldIdLst>
   <p:sldSz cx="12192000" cy="6858000"/>
   <p:notesSz cx="6858000" cy="12192000"/>
@@ -485,7 +486,7 @@
     </p:spTree>
     <p:extLst>
       <p:ext uri="{BB962C8B-B14F-4D97-AF65-F5344CB8AC3E}">
-        <p14:creationId xmlns:p14="http://schemas.microsoft.com/office/powerpoint/2010/main" val="1024086991"/>
+        <p14:creationId xmlns:p14="http://schemas.microsoft.com/office/powerpoint/2010/main" val="614921503"/>
       </p:ext>
     </p:extLst>
   </p:cSld>
@@ -560,7 +561,7 @@
           <a:p>
             <a:fld id="{F7021451-1387-4CA6-816F-3879F97B5CBC}" type="slidenum">
               <a:rPr lang="en-US"/>
-              <a:t>5</a:t>
+              <a:t>4</a:t>
             </a:fld>
             <a:endParaRPr lang="en-US"/>
           </a:p>
@@ -644,7 +645,91 @@
           <a:p>
             <a:fld id="{F7021451-1387-4CA6-816F-3879F97B5CBC}" type="slidenum">
               <a:rPr lang="en-US"/>
-              <a:t>7</a:t>
+              <a:t>6</a:t>
+            </a:fld>
+            <a:endParaRPr lang="en-US"/>
+          </a:p>
+        </p:txBody>
+      </p:sp>
+    </p:spTree>
+    <p:extLst>
+      <p:ext uri="{BB962C8B-B14F-4D97-AF65-F5344CB8AC3E}">
+        <p14:creationId xmlns:p14="http://schemas.microsoft.com/office/powerpoint/2010/main" val="1024086991"/>
+      </p:ext>
+    </p:extLst>
+  </p:cSld>
+  <p:clrMapOvr>
+    <a:masterClrMapping/>
+  </p:clrMapOvr>
+</p:notes>
+</file>
+
+<file path=ppt/notesSlides/notesSlide6.xml><?xml version="1.0" encoding="utf-8"?>
+<p:notes xmlns:a="http://schemas.openxmlformats.org/drawingml/2006/main" xmlns:r="http://schemas.openxmlformats.org/officeDocument/2006/relationships" xmlns:p="http://schemas.openxmlformats.org/presentationml/2006/main">
+  <p:cSld>
+    <p:spTree>
+      <p:nvGrpSpPr>
+        <p:cNvPr id="1" name=""/>
+        <p:cNvGrpSpPr/>
+        <p:nvPr/>
+      </p:nvGrpSpPr>
+      <p:grpSpPr>
+        <a:xfrm>
+          <a:off x="0" y="0"/>
+          <a:ext cx="0" cy="0"/>
+          <a:chOff x="0" y="0"/>
+          <a:chExt cx="0" cy="0"/>
+        </a:xfrm>
+      </p:grpSpPr>
+      <p:sp>
+        <p:nvSpPr>
+          <p:cNvPr id="2" name="Slide Image Placeholder 1"/>
+          <p:cNvSpPr>
+            <a:spLocks noGrp="1" noRot="1" noChangeAspect="1"/>
+          </p:cNvSpPr>
+          <p:nvPr>
+            <p:ph type="sldImg"/>
+          </p:nvPr>
+        </p:nvSpPr>
+        <p:spPr/>
+      </p:sp>
+      <p:sp>
+        <p:nvSpPr>
+          <p:cNvPr id="3" name="Notes Placeholder 2"/>
+          <p:cNvSpPr>
+            <a:spLocks noGrp="1"/>
+          </p:cNvSpPr>
+          <p:nvPr>
+            <p:ph type="body" idx="1"/>
+          </p:nvPr>
+        </p:nvSpPr>
+        <p:spPr/>
+        <p:txBody>
+          <a:bodyPr/>
+          <a:lstStyle/>
+          <a:p>
+            <a:endParaRPr lang="en-US" dirty="0"/>
+          </a:p>
+        </p:txBody>
+      </p:sp>
+      <p:sp>
+        <p:nvSpPr>
+          <p:cNvPr id="4" name="Slide Number Placeholder 3"/>
+          <p:cNvSpPr>
+            <a:spLocks noGrp="1"/>
+          </p:cNvSpPr>
+          <p:nvPr>
+            <p:ph type="sldNum" sz="quarter" idx="10"/>
+          </p:nvPr>
+        </p:nvSpPr>
+        <p:spPr/>
+        <p:txBody>
+          <a:bodyPr/>
+          <a:lstStyle/>
+          <a:p>
+            <a:fld id="{F7021451-1387-4CA6-816F-3879F97B5CBC}" type="slidenum">
+              <a:rPr lang="en-US"/>
+              <a:t>8</a:t>
             </a:fld>
             <a:endParaRPr lang="en-US"/>
           </a:p>
@@ -1427,6 +1512,17 @@
               <a:buNone/>
             </a:pPr>
             <a:r>
+              <a:rPr lang="en-US" sz="2400" dirty="0" err="1">
+                <a:solidFill>
+                  <a:srgbClr val="E8ECF3"/>
+                </a:solidFill>
+                <a:latin typeface="Calibri" pitchFamily="34" charset="0"/>
+                <a:ea typeface="Calibri" pitchFamily="34" charset="-122"/>
+                <a:cs typeface="Calibri" pitchFamily="34" charset="-120"/>
+              </a:rPr>
+              <a:t>老虎機網頁</a:t>
+            </a:r>
+            <a:r>
               <a:rPr lang="en-US" sz="2400" dirty="0">
                 <a:solidFill>
                   <a:srgbClr val="E8ECF3"/>
@@ -1435,7 +1531,18 @@
                 <a:ea typeface="Calibri" pitchFamily="34" charset="-122"/>
                 <a:cs typeface="Calibri" pitchFamily="34" charset="-120"/>
               </a:rPr>
-              <a:t>老虎機網頁 — CSS / JS 練習專案</a:t>
+              <a:t> — CSS / JS </a:t>
+            </a:r>
+            <a:r>
+              <a:rPr lang="en-US" sz="2400" dirty="0" err="1">
+                <a:solidFill>
+                  <a:srgbClr val="E8ECF3"/>
+                </a:solidFill>
+                <a:latin typeface="Calibri" pitchFamily="34" charset="0"/>
+                <a:ea typeface="Calibri" pitchFamily="34" charset="-122"/>
+                <a:cs typeface="Calibri" pitchFamily="34" charset="-120"/>
+              </a:rPr>
+              <a:t>專案</a:t>
             </a:r>
             <a:endParaRPr lang="en-US" sz="2400" dirty="0"/>
           </a:p>
@@ -1546,7 +1653,7 @@
                 <a:ea typeface="Calibri" pitchFamily="34" charset="-122"/>
                 <a:cs typeface="Calibri" pitchFamily="34" charset="-120"/>
               </a:rPr>
-              <a:t>為什麼選「老虎機」來練</a:t>
+              <a:t>為什麼選「老虎機」來</a:t>
             </a:r>
             <a:r>
               <a:rPr lang="zh-TW" altLang="en-US" sz="2000" i="1" dirty="0">
@@ -1557,7 +1664,7 @@
                 <a:ea typeface="Calibri" pitchFamily="34" charset="-122"/>
                 <a:cs typeface="Calibri" pitchFamily="34" charset="-120"/>
               </a:rPr>
-              <a:t>習</a:t>
+              <a:t>展示</a:t>
             </a:r>
             <a:r>
               <a:rPr lang="en-US" sz="2000" i="1" dirty="0">
@@ -1568,7 +1675,7 @@
                 <a:ea typeface="Calibri" pitchFamily="34" charset="-122"/>
                 <a:cs typeface="Calibri" pitchFamily="34" charset="-120"/>
               </a:rPr>
-              <a:t> CSS 和 JS？</a:t>
+              <a:t>CSS 和 JS？</a:t>
             </a:r>
             <a:endParaRPr lang="en-US" sz="2000" dirty="0"/>
           </a:p>
@@ -1926,6 +2033,117 @@
 </file>
 
 <file path=ppt/slides/slide3.xml><?xml version="1.0" encoding="utf-8"?>
+<p:sld xmlns:a="http://schemas.openxmlformats.org/drawingml/2006/main" xmlns:r="http://schemas.openxmlformats.org/officeDocument/2006/relationships" xmlns:p="http://schemas.openxmlformats.org/presentationml/2006/main">
+  <p:cSld>
+    <p:bg>
+      <p:bgPr>
+        <a:solidFill>
+          <a:srgbClr val="020E20"/>
+        </a:solidFill>
+        <a:effectLst/>
+      </p:bgPr>
+    </p:bg>
+    <p:spTree>
+      <p:nvGrpSpPr>
+        <p:cNvPr id="1" name=""/>
+        <p:cNvGrpSpPr/>
+        <p:nvPr/>
+      </p:nvGrpSpPr>
+      <p:grpSpPr>
+        <a:xfrm>
+          <a:off x="0" y="0"/>
+          <a:ext cx="0" cy="0"/>
+          <a:chOff x="0" y="0"/>
+          <a:chExt cx="0" cy="0"/>
+        </a:xfrm>
+      </p:grpSpPr>
+      <p:pic>
+        <p:nvPicPr>
+          <p:cNvPr id="8" name="圖片 7">
+            <a:extLst>
+              <a:ext uri="{FF2B5EF4-FFF2-40B4-BE49-F238E27FC236}">
+                <a16:creationId xmlns:a16="http://schemas.microsoft.com/office/drawing/2014/main" id="{4F91808A-E238-4862-9F63-4328BACC6A44}"/>
+              </a:ext>
+            </a:extLst>
+          </p:cNvPr>
+          <p:cNvPicPr>
+            <a:picLocks noChangeAspect="1"/>
+          </p:cNvPicPr>
+          <p:nvPr/>
+        </p:nvPicPr>
+        <p:blipFill>
+          <a:blip r:embed="rId3"/>
+          <a:stretch>
+            <a:fillRect/>
+          </a:stretch>
+        </p:blipFill>
+        <p:spPr>
+          <a:xfrm>
+            <a:off x="0" y="1485614"/>
+            <a:ext cx="12192000" cy="4759228"/>
+          </a:xfrm>
+          <a:prstGeom prst="rect">
+            <a:avLst/>
+          </a:prstGeom>
+        </p:spPr>
+      </p:pic>
+      <p:sp>
+        <p:nvSpPr>
+          <p:cNvPr id="16" name="Text 0">
+            <a:extLst>
+              <a:ext uri="{FF2B5EF4-FFF2-40B4-BE49-F238E27FC236}">
+                <a16:creationId xmlns:a16="http://schemas.microsoft.com/office/drawing/2014/main" id="{9907D68A-FC43-4E13-A35E-5BD387F4C61C}"/>
+              </a:ext>
+            </a:extLst>
+          </p:cNvPr>
+          <p:cNvSpPr/>
+          <p:nvPr/>
+        </p:nvSpPr>
+        <p:spPr>
+          <a:xfrm>
+            <a:off x="287742" y="158972"/>
+            <a:ext cx="7315200" cy="822960"/>
+          </a:xfrm>
+          <a:prstGeom prst="rect">
+            <a:avLst/>
+          </a:prstGeom>
+          <a:noFill/>
+          <a:ln/>
+        </p:spPr>
+        <p:txBody>
+          <a:bodyPr wrap="square" rtlCol="0" anchor="ctr"/>
+          <a:lstStyle/>
+          <a:p>
+            <a:pPr marL="0" indent="0">
+              <a:buNone/>
+            </a:pPr>
+            <a:r>
+              <a:rPr lang="zh-TW" altLang="en-US" sz="4000" b="1" dirty="0">
+                <a:solidFill>
+                  <a:srgbClr val="FFC107"/>
+                </a:solidFill>
+                <a:latin typeface="Cambria" pitchFamily="34" charset="0"/>
+              </a:rPr>
+              <a:t>遊戲規則</a:t>
+            </a:r>
+            <a:endParaRPr lang="en-US" sz="4000" dirty="0"/>
+          </a:p>
+        </p:txBody>
+      </p:sp>
+    </p:spTree>
+    <p:extLst>
+      <p:ext uri="{BB962C8B-B14F-4D97-AF65-F5344CB8AC3E}">
+        <p14:creationId xmlns:p14="http://schemas.microsoft.com/office/powerpoint/2010/main" val="841915279"/>
+      </p:ext>
+    </p:extLst>
+  </p:cSld>
+  <p:clrMapOvr>
+    <a:masterClrMapping/>
+  </p:clrMapOvr>
+</p:sld>
+</file>
+
+<file path=ppt/slides/slide4.xml><?xml version="1.0" encoding="utf-8"?>
 <p:sld xmlns:a="http://schemas.openxmlformats.org/drawingml/2006/main" xmlns:r="http://schemas.openxmlformats.org/officeDocument/2006/relationships" xmlns:p="http://schemas.openxmlformats.org/presentationml/2006/main">
   <p:cSld name="Slide 3">
     <p:bg>
@@ -2531,7 +2749,7 @@
 </p:sld>
 </file>
 
-<file path=ppt/slides/slide4.xml><?xml version="1.0" encoding="utf-8"?>
+<file path=ppt/slides/slide5.xml><?xml version="1.0" encoding="utf-8"?>
 <p:sld xmlns:a="http://schemas.openxmlformats.org/drawingml/2006/main" xmlns:r="http://schemas.openxmlformats.org/officeDocument/2006/relationships" xmlns:p="http://schemas.openxmlformats.org/presentationml/2006/main">
   <p:cSld>
     <p:bg>
@@ -3717,7 +3935,7 @@
 </p:sld>
 </file>
 
-<file path=ppt/slides/slide5.xml><?xml version="1.0" encoding="utf-8"?>
+<file path=ppt/slides/slide6.xml><?xml version="1.0" encoding="utf-8"?>
 <p:sld xmlns:a="http://schemas.openxmlformats.org/drawingml/2006/main" xmlns:r="http://schemas.openxmlformats.org/officeDocument/2006/relationships" xmlns:p="http://schemas.openxmlformats.org/presentationml/2006/main">
   <p:cSld name="Slide 4">
     <p:bg>
@@ -4835,7 +5053,7 @@
 </p:sld>
 </file>
 
-<file path=ppt/slides/slide6.xml><?xml version="1.0" encoding="utf-8"?>
+<file path=ppt/slides/slide7.xml><?xml version="1.0" encoding="utf-8"?>
 <p:sld xmlns:a="http://schemas.openxmlformats.org/drawingml/2006/main" xmlns:r="http://schemas.openxmlformats.org/officeDocument/2006/relationships" xmlns:p="http://schemas.openxmlformats.org/presentationml/2006/main">
   <p:cSld>
     <p:bg>
@@ -5665,7 +5883,7 @@
 </p:sld>
 </file>
 
-<file path=ppt/slides/slide7.xml><?xml version="1.0" encoding="utf-8"?>
+<file path=ppt/slides/slide8.xml><?xml version="1.0" encoding="utf-8"?>
 <p:sld xmlns:a="http://schemas.openxmlformats.org/drawingml/2006/main" xmlns:r="http://schemas.openxmlformats.org/officeDocument/2006/relationships" xmlns:p="http://schemas.openxmlformats.org/presentationml/2006/main">
   <p:cSld>
     <p:bg>

--- a/老虎機專案簡報.pptx
+++ b/老虎機專案簡報.pptx
@@ -1118,6 +1118,13 @@
             </a:outerShdw>
           </a:effectLst>
         </p:spPr>
+        <p:txBody>
+          <a:bodyPr/>
+          <a:lstStyle/>
+          <a:p>
+            <a:endParaRPr lang="zh-TW" altLang="en-US"/>
+          </a:p>
+        </p:txBody>
       </p:sp>
       <p:sp>
         <p:nvSpPr>
@@ -1191,6 +1198,13 @@
             </a:outerShdw>
           </a:effectLst>
         </p:spPr>
+        <p:txBody>
+          <a:bodyPr/>
+          <a:lstStyle/>
+          <a:p>
+            <a:endParaRPr lang="zh-TW" altLang="en-US"/>
+          </a:p>
+        </p:txBody>
       </p:sp>
       <p:sp>
         <p:nvSpPr>
@@ -1264,6 +1278,13 @@
             </a:outerShdw>
           </a:effectLst>
         </p:spPr>
+        <p:txBody>
+          <a:bodyPr/>
+          <a:lstStyle/>
+          <a:p>
+            <a:endParaRPr lang="zh-TW" altLang="en-US"/>
+          </a:p>
+        </p:txBody>
       </p:sp>
       <p:sp>
         <p:nvSpPr>
@@ -1335,6 +1356,13 @@
             </a:outerShdw>
           </a:effectLst>
         </p:spPr>
+        <p:txBody>
+          <a:bodyPr/>
+          <a:lstStyle/>
+          <a:p>
+            <a:endParaRPr lang="zh-TW" altLang="en-US"/>
+          </a:p>
+        </p:txBody>
       </p:sp>
       <p:sp>
         <p:nvSpPr>
@@ -1408,6 +1436,13 @@
             </a:outerShdw>
           </a:effectLst>
         </p:spPr>
+        <p:txBody>
+          <a:bodyPr/>
+          <a:lstStyle/>
+          <a:p>
+            <a:endParaRPr lang="zh-TW" altLang="en-US"/>
+          </a:p>
+        </p:txBody>
       </p:sp>
       <p:sp>
         <p:nvSpPr>
@@ -1707,6 +1742,13 @@
             </a:outerShdw>
           </a:effectLst>
         </p:spPr>
+        <p:txBody>
+          <a:bodyPr/>
+          <a:lstStyle/>
+          <a:p>
+            <a:endParaRPr lang="zh-TW" altLang="en-US"/>
+          </a:p>
+        </p:txBody>
       </p:sp>
       <p:sp>
         <p:nvSpPr>
@@ -1884,6 +1926,13 @@
             </a:outerShdw>
           </a:effectLst>
         </p:spPr>
+        <p:txBody>
+          <a:bodyPr/>
+          <a:lstStyle/>
+          <a:p>
+            <a:endParaRPr lang="zh-TW" altLang="en-US"/>
+          </a:p>
+        </p:txBody>
       </p:sp>
       <p:sp>
         <p:nvSpPr>
@@ -2240,6 +2289,13 @@
             </a:outerShdw>
           </a:effectLst>
         </p:spPr>
+        <p:txBody>
+          <a:bodyPr/>
+          <a:lstStyle/>
+          <a:p>
+            <a:endParaRPr lang="zh-TW" altLang="en-US"/>
+          </a:p>
+        </p:txBody>
       </p:sp>
       <p:sp>
         <p:nvSpPr>
@@ -2567,7 +2623,40 @@
                 <a:ea typeface="Calibri" pitchFamily="34" charset="-122"/>
                 <a:cs typeface="Calibri" pitchFamily="34" charset="-120"/>
               </a:rPr>
-              <a:t>⚙️  後端（Spring Boot）</a:t>
+              <a:t>⚙️  </a:t>
+            </a:r>
+            <a:r>
+              <a:rPr lang="en-US" sz="2000" b="1" dirty="0" err="1">
+                <a:solidFill>
+                  <a:srgbClr val="F5D77A"/>
+                </a:solidFill>
+                <a:latin typeface="Calibri" pitchFamily="34" charset="0"/>
+                <a:ea typeface="Calibri" pitchFamily="34" charset="-122"/>
+                <a:cs typeface="Calibri" pitchFamily="34" charset="-120"/>
+              </a:rPr>
+              <a:t>後端（</a:t>
+            </a:r>
+            <a:r>
+              <a:rPr lang="en-US" altLang="zh-TW" sz="2000" b="1" dirty="0" err="1">
+                <a:solidFill>
+                  <a:srgbClr val="F5D77A"/>
+                </a:solidFill>
+                <a:latin typeface="Calibri" pitchFamily="34" charset="0"/>
+                <a:ea typeface="Calibri" pitchFamily="34" charset="-122"/>
+                <a:cs typeface="Calibri" pitchFamily="34" charset="-120"/>
+              </a:rPr>
+              <a:t>Java</a:t>
+            </a:r>
+            <a:r>
+              <a:rPr lang="en-US" sz="2000" b="1" dirty="0">
+                <a:solidFill>
+                  <a:srgbClr val="F5D77A"/>
+                </a:solidFill>
+                <a:latin typeface="Calibri" pitchFamily="34" charset="0"/>
+                <a:ea typeface="Calibri" pitchFamily="34" charset="-122"/>
+                <a:cs typeface="Calibri" pitchFamily="34" charset="-120"/>
+              </a:rPr>
+              <a:t>）</a:t>
             </a:r>
             <a:endParaRPr lang="en-US" sz="2000" dirty="0"/>
           </a:p>
@@ -4068,6 +4157,13 @@
             </a:outerShdw>
           </a:effectLst>
         </p:spPr>
+        <p:txBody>
+          <a:bodyPr/>
+          <a:lstStyle/>
+          <a:p>
+            <a:endParaRPr lang="zh-TW" altLang="en-US"/>
+          </a:p>
+        </p:txBody>
       </p:sp>
       <p:sp>
         <p:nvSpPr>
@@ -4281,6 +4377,13 @@
             </a:outerShdw>
           </a:effectLst>
         </p:spPr>
+        <p:txBody>
+          <a:bodyPr/>
+          <a:lstStyle/>
+          <a:p>
+            <a:endParaRPr lang="zh-TW" altLang="en-US"/>
+          </a:p>
+        </p:txBody>
       </p:sp>
       <p:sp>
         <p:nvSpPr>
@@ -4447,6 +4550,13 @@
             </a:outerShdw>
           </a:effectLst>
         </p:spPr>
+        <p:txBody>
+          <a:bodyPr/>
+          <a:lstStyle/>
+          <a:p>
+            <a:endParaRPr lang="zh-TW" altLang="en-US"/>
+          </a:p>
+        </p:txBody>
       </p:sp>
       <p:sp>
         <p:nvSpPr>
@@ -4624,6 +4734,13 @@
             </a:outerShdw>
           </a:effectLst>
         </p:spPr>
+        <p:txBody>
+          <a:bodyPr/>
+          <a:lstStyle/>
+          <a:p>
+            <a:endParaRPr lang="zh-TW" altLang="en-US"/>
+          </a:p>
+        </p:txBody>
       </p:sp>
       <p:sp>
         <p:nvSpPr>
@@ -4824,6 +4941,13 @@
             <a:prstDash val="solid"/>
           </a:ln>
         </p:spPr>
+        <p:txBody>
+          <a:bodyPr/>
+          <a:lstStyle/>
+          <a:p>
+            <a:endParaRPr lang="zh-TW" altLang="en-US"/>
+          </a:p>
+        </p:txBody>
       </p:sp>
       <p:sp>
         <p:nvSpPr>
@@ -4966,6 +5090,13 @@
             <a:tailEnd type="none"/>
           </a:ln>
         </p:spPr>
+        <p:txBody>
+          <a:bodyPr/>
+          <a:lstStyle/>
+          <a:p>
+            <a:endParaRPr lang="zh-TW" altLang="en-US"/>
+          </a:p>
+        </p:txBody>
       </p:sp>
       <p:sp>
         <p:nvSpPr>
